--- a/slidedecks/PPT Carrousel - OCPF BC Agentic Dev Framework.pptx
+++ b/slidedecks/PPT Carrousel - OCPF BC Agentic Dev Framework.pptx
@@ -1623,7 +1623,7 @@
                 <a:ea typeface="Archivo" pitchFamily="34" charset="-122"/>
                 <a:cs typeface="Archivo" pitchFamily="34" charset="-120"/>
               </a:rPr>
-              <a:t>Agentic Development Framework</a:t>
+              <a:t>D365 BC Agentic Development Framework</a:t>
             </a:r>
             <a:endParaRPr lang="en-US" sz="7800" dirty="0"/>
           </a:p>
@@ -1694,7 +1694,26 @@
                 <a:ea typeface="Archivo" pitchFamily="34" charset="-122"/>
                 <a:cs typeface="Archivo" pitchFamily="34" charset="-120"/>
               </a:rPr>
-              <a:t>Simple Enough for Functional Consultants. Robust Enough for Pro Developers.</a:t>
+              <a:t>Simple Enough for Functional Consultants. </a:t>
+            </a:r>
+          </a:p>
+          <a:p>
+            <a:pPr marL="0" indent="0" algn="l">
+              <a:lnSpc>
+                <a:spcPct val="114458"/>
+              </a:lnSpc>
+              <a:buNone/>
+            </a:pPr>
+            <a:r>
+              <a:rPr lang="en-US" sz="2850" b="1" dirty="0">
+                <a:solidFill>
+                  <a:srgbClr val="201E1D"/>
+                </a:solidFill>
+                <a:latin typeface="Archivo" pitchFamily="34" charset="0"/>
+                <a:ea typeface="Archivo" pitchFamily="34" charset="-122"/>
+                <a:cs typeface="Archivo" pitchFamily="34" charset="-120"/>
+              </a:rPr>
+              <a:t>Robust Enough for Pro Developers.</a:t>
             </a:r>
             <a:endParaRPr lang="en-US" sz="2850" dirty="0"/>
           </a:p>
@@ -1850,7 +1869,23 @@
                 <a:ea typeface="Archivo" pitchFamily="34" charset="-122"/>
                 <a:cs typeface="Archivo" pitchFamily="34" charset="-120"/>
               </a:rPr>
-              <a:t>ONLYCOPILOTFANS — AGENTIC DEVELOPMENT FRAMEWORK</a:t>
+              <a:t>ONLYCOPILOTFANS — </a:t>
+            </a:r>
+          </a:p>
+          <a:p>
+            <a:pPr marL="0" indent="0" algn="l">
+              <a:buNone/>
+            </a:pPr>
+            <a:r>
+              <a:rPr lang="en-US" sz="1950" b="1" kern="0" spc="351" dirty="0">
+                <a:solidFill>
+                  <a:srgbClr val="F3F2F2"/>
+                </a:solidFill>
+                <a:latin typeface="Archivo" pitchFamily="34" charset="0"/>
+                <a:ea typeface="Archivo" pitchFamily="34" charset="-122"/>
+                <a:cs typeface="Archivo" pitchFamily="34" charset="-120"/>
+              </a:rPr>
+              <a:t>BC AGENTIC DEVELOPMENT FRAMEWORK</a:t>
             </a:r>
             <a:endParaRPr lang="en-US" sz="1950" dirty="0"/>
           </a:p>
@@ -11845,7 +11880,18 @@
                 <a:ea typeface="Archivo" pitchFamily="34" charset="-122"/>
                 <a:cs typeface="Archivo" pitchFamily="34" charset="-120"/>
               </a:rPr>
-              <a:t>MAIN ROLE</a:t>
+              <a:t>MAIN ROLE </a:t>
+            </a:r>
+            <a:r>
+              <a:rPr lang="en-US" sz="2550" dirty="0">
+                <a:solidFill>
+                  <a:srgbClr val="201E1D"/>
+                </a:solidFill>
+                <a:latin typeface="Archivo" pitchFamily="34" charset="0"/>
+                <a:ea typeface="Archivo" pitchFamily="34" charset="-122"/>
+                <a:cs typeface="Archivo" pitchFamily="34" charset="-120"/>
+              </a:rPr>
+              <a:t>(Primary Agent; Run model like Claude Sonnet)</a:t>
             </a:r>
             <a:endParaRPr lang="en-US" sz="2550" dirty="0"/>
           </a:p>
@@ -12038,7 +12084,18 @@
                 <a:ea typeface="Archivo" pitchFamily="34" charset="-122"/>
                 <a:cs typeface="Archivo" pitchFamily="34" charset="-120"/>
               </a:rPr>
-              <a:t>LIGHT ROLE</a:t>
+              <a:t>LIGHT ROLE </a:t>
+            </a:r>
+            <a:r>
+              <a:rPr lang="en-US" sz="2550" dirty="0">
+                <a:solidFill>
+                  <a:srgbClr val="201E1D"/>
+                </a:solidFill>
+                <a:latin typeface="Archivo" pitchFamily="34" charset="0"/>
+                <a:ea typeface="Archivo" pitchFamily="34" charset="-122"/>
+                <a:cs typeface="Archivo" pitchFamily="34" charset="-120"/>
+              </a:rPr>
+              <a:t>(Sub-Agent; Run model like Claude Haiku)</a:t>
             </a:r>
             <a:endParaRPr lang="en-US" sz="2550" dirty="0"/>
           </a:p>
@@ -12231,7 +12288,18 @@
                 <a:ea typeface="Archivo" pitchFamily="34" charset="-122"/>
                 <a:cs typeface="Archivo" pitchFamily="34" charset="-120"/>
               </a:rPr>
-              <a:t>REASONING ROLE</a:t>
+              <a:t>REASONING ROLE </a:t>
+            </a:r>
+            <a:r>
+              <a:rPr lang="en-US" sz="2550" dirty="0">
+                <a:solidFill>
+                  <a:srgbClr val="201E1D"/>
+                </a:solidFill>
+                <a:latin typeface="Archivo" pitchFamily="34" charset="0"/>
+                <a:ea typeface="Archivo" pitchFamily="34" charset="-122"/>
+                <a:cs typeface="Archivo" pitchFamily="34" charset="-120"/>
+              </a:rPr>
+              <a:t>(Sub-Agent; Run model like Claude Opus)</a:t>
             </a:r>
             <a:endParaRPr lang="en-US" sz="2550" dirty="0"/>
           </a:p>
